--- a/report/presentation/Praesentation_Jann_Koerner.pptx
+++ b/report/presentation/Praesentation_Jann_Koerner.pptx
@@ -5,7 +5,7 @@
     <p:sldMasterId id="2147483648" r:id="rId1"/>
   </p:sldMasterIdLst>
   <p:notesMasterIdLst>
-    <p:notesMasterId r:id="rId16"/>
+    <p:notesMasterId r:id="rId15"/>
   </p:notesMasterIdLst>
   <p:sldIdLst>
     <p:sldId id="256" r:id="rId2"/>
@@ -20,8 +20,7 @@
     <p:sldId id="265" r:id="rId11"/>
     <p:sldId id="266" r:id="rId12"/>
     <p:sldId id="267" r:id="rId13"/>
-    <p:sldId id="268" r:id="rId14"/>
-    <p:sldId id="270" r:id="rId15"/>
+    <p:sldId id="270" r:id="rId14"/>
   </p:sldIdLst>
   <p:sldSz cx="12192000" cy="6858000"/>
   <p:notesSz cx="6858000" cy="9144000"/>
@@ -603,83 +602,6 @@
 </file>
 
 <file path=ppt/notesSlides/notesSlide13.xml><?xml version="1.0" encoding="utf-8"?>
-<p:notes xmlns:a="http://schemas.openxmlformats.org/drawingml/2006/main" xmlns:r="http://schemas.openxmlformats.org/officeDocument/2006/relationships" xmlns:p="http://schemas.openxmlformats.org/presentationml/2006/main">
-  <p:cSld>
-    <p:spTree>
-      <p:nvGrpSpPr>
-        <p:cNvPr id="1" name=""/>
-        <p:cNvGrpSpPr/>
-        <p:nvPr/>
-      </p:nvGrpSpPr>
-      <p:grpSpPr>
-        <a:xfrm>
-          <a:off x="0" y="0"/>
-          <a:ext cx="0" cy="0"/>
-          <a:chOff x="0" y="0"/>
-          <a:chExt cx="0" cy="0"/>
-        </a:xfrm>
-      </p:grpSpPr>
-      <p:sp>
-        <p:nvSpPr>
-          <p:cNvPr id="2" name="Slide Image Placeholder 1"/>
-          <p:cNvSpPr>
-            <a:spLocks noGrp="1" noRot="1" noChangeAspect="1"/>
-          </p:cNvSpPr>
-          <p:nvPr>
-            <p:ph type="sldImg"/>
-          </p:nvPr>
-        </p:nvSpPr>
-        <p:spPr/>
-      </p:sp>
-      <p:sp>
-        <p:nvSpPr>
-          <p:cNvPr id="3" name="Notes Placeholder 2"/>
-          <p:cNvSpPr>
-            <a:spLocks noGrp="1"/>
-          </p:cNvSpPr>
-          <p:nvPr>
-            <p:ph type="body" idx="1"/>
-          </p:nvPr>
-        </p:nvSpPr>
-        <p:spPr/>
-        <p:txBody>
-          <a:bodyPr/>
-          <a:lstStyle/>
-          <a:p>
-            <a:r>
-              <a:t>Unveränderliche Daten bedeuten: update verändert den bestehenden State nicht, sondern erzeugt einen neuen Wert. Alle Ansichten bekommen danach denselben Zustand. Quelle: src/Main.elm</a:t>
-            </a:r>
-          </a:p>
-        </p:txBody>
-      </p:sp>
-      <p:sp>
-        <p:nvSpPr>
-          <p:cNvPr id="4" name="Slide Number Placeholder 3"/>
-          <p:cNvSpPr>
-            <a:spLocks noGrp="1"/>
-          </p:cNvSpPr>
-          <p:nvPr>
-            <p:ph type="sldNum" idx="5"/>
-          </p:nvPr>
-        </p:nvSpPr>
-        <p:spPr/>
-        <p:txBody>
-          <a:bodyPr/>
-          <a:lstStyle/>
-          <a:p>
-            <a:endParaRPr/>
-          </a:p>
-        </p:txBody>
-      </p:sp>
-    </p:spTree>
-  </p:cSld>
-  <p:clrMapOvr>
-    <a:masterClrMapping/>
-  </p:clrMapOvr>
-</p:notes>
-</file>
-
-<file path=ppt/notesSlides/notesSlide14.xml><?xml version="1.0" encoding="utf-8"?>
 <p:notes xmlns:a="http://schemas.openxmlformats.org/drawingml/2006/main" xmlns:r="http://schemas.openxmlformats.org/officeDocument/2006/relationships" xmlns:p="http://schemas.openxmlformats.org/presentationml/2006/main">
   <p:cSld>
     <p:spTree>
@@ -5271,1792 +5193,6 @@
     <p:bg>
       <p:bgPr>
         <a:solidFill>
-          <a:srgbClr val="FFFFFF"/>
-        </a:solidFill>
-        <a:effectLst/>
-      </p:bgPr>
-    </p:bg>
-    <p:spTree>
-      <p:nvGrpSpPr>
-        <p:cNvPr id="1" name=""/>
-        <p:cNvGrpSpPr/>
-        <p:nvPr/>
-      </p:nvGrpSpPr>
-      <p:grpSpPr>
-        <a:xfrm>
-          <a:off x="0" y="0"/>
-          <a:ext cx="0" cy="0"/>
-          <a:chOff x="0" y="0"/>
-          <a:chExt cx="0" cy="0"/>
-        </a:xfrm>
-      </p:grpSpPr>
-      <p:sp>
-        <p:nvSpPr>
-          <p:cNvPr id="18" name="Rechteck 17">
-            <a:extLst>
-              <a:ext uri="{FF2B5EF4-FFF2-40B4-BE49-F238E27FC236}">
-                <a16:creationId xmlns:a16="http://schemas.microsoft.com/office/drawing/2014/main" id="{62C59BF8-4BA0-4988-8568-4A8D41EDF2FC}"/>
-              </a:ext>
-            </a:extLst>
-          </p:cNvPr>
-          <p:cNvSpPr>
-            <a:spLocks noGrp="1"/>
-          </p:cNvSpPr>
-          <p:nvPr/>
-        </p:nvSpPr>
-        <p:spPr>
-          <a:xfrm>
-            <a:off x="552450" y="323850"/>
-            <a:ext cx="10287000" cy="533400"/>
-          </a:xfrm>
-          <a:prstGeom prst="rect">
-            <a:avLst/>
-          </a:prstGeom>
-          <a:noFill/>
-          <a:ln w="0">
-            <a:noFill/>
-          </a:ln>
-        </p:spPr>
-        <p:txBody>
-          <a:bodyPr wrap="square" lIns="19050" tIns="19050" rIns="19050" bIns="19050" anchor="t">
-            <a:noAutofit/>
-          </a:bodyPr>
-          <a:lstStyle/>
-          <a:p>
-            <a:pPr algn="l">
-              <a:defRPr sz="2550" b="1">
-                <a:solidFill>
-                  <a:srgbClr val="19324A"/>
-                </a:solidFill>
-                <a:latin typeface="Arial"/>
-                <a:ea typeface="Arial"/>
-                <a:cs typeface="Arial"/>
-              </a:defRPr>
-            </a:pPr>
-            <a:r>
-              <a:rPr sz="2550" b="1">
-                <a:solidFill>
-                  <a:srgbClr val="19324A"/>
-                </a:solidFill>
-                <a:latin typeface="Arial"/>
-                <a:ea typeface="Arial"/>
-                <a:cs typeface="Arial"/>
-              </a:rPr>
-              <a:t>Zustand und Kopplung der Ansichten</a:t>
-            </a:r>
-          </a:p>
-        </p:txBody>
-      </p:sp>
-      <p:sp>
-        <p:nvSpPr>
-          <p:cNvPr id="2" name="Rechteck 1">
-            <a:extLst>
-              <a:ext uri="{FF2B5EF4-FFF2-40B4-BE49-F238E27FC236}">
-                <a16:creationId xmlns:a16="http://schemas.microsoft.com/office/drawing/2014/main" id="{C85BE713-6768-4831-A455-ACF8D3F1A0F1}"/>
-              </a:ext>
-            </a:extLst>
-          </p:cNvPr>
-          <p:cNvSpPr>
-            <a:spLocks noGrp="1"/>
-          </p:cNvSpPr>
-          <p:nvPr/>
-        </p:nvSpPr>
-        <p:spPr>
-          <a:xfrm>
-            <a:off x="552450" y="895350"/>
-            <a:ext cx="11087100" cy="28575"/>
-          </a:xfrm>
-          <a:prstGeom prst="rect">
-            <a:avLst/>
-          </a:prstGeom>
-          <a:solidFill>
-            <a:srgbClr val="F2C94C"/>
-          </a:solidFill>
-          <a:ln w="0">
-            <a:noFill/>
-          </a:ln>
-        </p:spPr>
-      </p:sp>
-      <p:sp>
-        <p:nvSpPr>
-          <p:cNvPr id="3" name="Rechteck 2">
-            <a:extLst>
-              <a:ext uri="{FF2B5EF4-FFF2-40B4-BE49-F238E27FC236}">
-                <a16:creationId xmlns:a16="http://schemas.microsoft.com/office/drawing/2014/main" id="{F005C887-6660-4E47-90D6-50424B1021A4}"/>
-              </a:ext>
-            </a:extLst>
-          </p:cNvPr>
-          <p:cNvSpPr>
-            <a:spLocks noGrp="1"/>
-          </p:cNvSpPr>
-          <p:nvPr/>
-        </p:nvSpPr>
-        <p:spPr>
-          <a:xfrm>
-            <a:off x="11144250" y="361950"/>
-            <a:ext cx="495300" cy="342900"/>
-          </a:xfrm>
-          <a:prstGeom prst="rect">
-            <a:avLst/>
-          </a:prstGeom>
-          <a:noFill/>
-          <a:ln w="0">
-            <a:noFill/>
-          </a:ln>
-        </p:spPr>
-        <p:txBody>
-          <a:bodyPr wrap="square" lIns="19050" tIns="19050" rIns="19050" bIns="19050" anchor="t">
-            <a:noAutofit/>
-          </a:bodyPr>
-          <a:lstStyle/>
-          <a:p>
-            <a:pPr algn="r">
-              <a:defRPr sz="1350" b="1">
-                <a:solidFill>
-                  <a:srgbClr val="5B6776"/>
-                </a:solidFill>
-                <a:latin typeface="Arial"/>
-                <a:ea typeface="Arial"/>
-                <a:cs typeface="Arial"/>
-              </a:defRPr>
-            </a:pPr>
-            <a:r>
-              <a:rPr sz="1350" b="1">
-                <a:solidFill>
-                  <a:srgbClr val="5B6776"/>
-                </a:solidFill>
-                <a:latin typeface="Arial"/>
-                <a:ea typeface="Arial"/>
-                <a:cs typeface="Arial"/>
-              </a:rPr>
-              <a:t>13</a:t>
-            </a:r>
-          </a:p>
-        </p:txBody>
-      </p:sp>
-      <p:sp>
-        <p:nvSpPr>
-          <p:cNvPr id="4" name="Rechteck: abgerundete Ecken 3">
-            <a:extLst>
-              <a:ext uri="{FF2B5EF4-FFF2-40B4-BE49-F238E27FC236}">
-                <a16:creationId xmlns:a16="http://schemas.microsoft.com/office/drawing/2014/main" id="{C3C131E3-90CC-48E8-A336-90ABF3DC72E0}"/>
-              </a:ext>
-            </a:extLst>
-          </p:cNvPr>
-          <p:cNvSpPr>
-            <a:spLocks noGrp="1"/>
-          </p:cNvSpPr>
-          <p:nvPr/>
-        </p:nvSpPr>
-        <p:spPr>
-          <a:xfrm>
-            <a:off x="552450" y="1381125"/>
-            <a:ext cx="4810125" cy="3429000"/>
-          </a:xfrm>
-          <a:prstGeom prst="roundRect">
-            <a:avLst>
-              <a:gd name="adj" fmla="val 3333"/>
-            </a:avLst>
-          </a:prstGeom>
-          <a:solidFill>
-            <a:srgbClr val="EEF2F7"/>
-          </a:solidFill>
-          <a:ln w="9525">
-            <a:solidFill>
-              <a:srgbClr val="CBD5E1"/>
-            </a:solidFill>
-            <a:prstDash val="solid"/>
-          </a:ln>
-        </p:spPr>
-        <p:txBody>
-          <a:bodyPr lIns="133350" tIns="114300" rIns="133350" bIns="114300" anchor="ctr">
-            <a:normAutofit/>
-          </a:bodyPr>
-          <a:lstStyle/>
-          <a:p>
-            <a:pPr>
-              <a:defRPr sz="1275">
-                <a:solidFill>
-                  <a:srgbClr val="172033"/>
-                </a:solidFill>
-                <a:latin typeface="Arial"/>
-                <a:ea typeface="Arial"/>
-                <a:cs typeface="Arial"/>
-              </a:defRPr>
-            </a:pPr>
-            <a:r>
-              <a:rPr sz="1275" dirty="0">
-                <a:solidFill>
-                  <a:srgbClr val="172033"/>
-                </a:solidFill>
-                <a:latin typeface="Arial"/>
-                <a:ea typeface="Arial"/>
-                <a:cs typeface="Arial"/>
-              </a:rPr>
-              <a:t>type alias State =</a:t>
-            </a:r>
-          </a:p>
-          <a:p>
-            <a:pPr>
-              <a:defRPr sz="1275">
-                <a:solidFill>
-                  <a:srgbClr val="172033"/>
-                </a:solidFill>
-                <a:latin typeface="Arial"/>
-                <a:ea typeface="Arial"/>
-                <a:cs typeface="Arial"/>
-              </a:defRPr>
-            </a:pPr>
-            <a:r>
-              <a:rPr sz="1275" dirty="0">
-                <a:solidFill>
-                  <a:srgbClr val="172033"/>
-                </a:solidFill>
-                <a:latin typeface="Arial"/>
-                <a:ea typeface="Arial"/>
-                <a:cs typeface="Arial"/>
-              </a:rPr>
-              <a:t>  { dataset : Dataset</a:t>
-            </a:r>
-          </a:p>
-          <a:p>
-            <a:pPr>
-              <a:defRPr sz="1275">
-                <a:solidFill>
-                  <a:srgbClr val="172033"/>
-                </a:solidFill>
-                <a:latin typeface="Arial"/>
-                <a:ea typeface="Arial"/>
-                <a:cs typeface="Arial"/>
-              </a:defRPr>
-            </a:pPr>
-            <a:r>
-              <a:rPr sz="1275" dirty="0">
-                <a:solidFill>
-                  <a:srgbClr val="172033"/>
-                </a:solidFill>
-                <a:latin typeface="Arial"/>
-                <a:ea typeface="Arial"/>
-                <a:cs typeface="Arial"/>
-              </a:rPr>
-              <a:t>  , </a:t>
-            </a:r>
-            <a:r>
-              <a:rPr sz="1275" dirty="0" err="1">
-                <a:solidFill>
-                  <a:srgbClr val="172033"/>
-                </a:solidFill>
-                <a:latin typeface="Arial"/>
-                <a:ea typeface="Arial"/>
-                <a:cs typeface="Arial"/>
-              </a:rPr>
-              <a:t>selectedIndex</a:t>
-            </a:r>
-            <a:r>
-              <a:rPr sz="1275" dirty="0">
-                <a:solidFill>
-                  <a:srgbClr val="172033"/>
-                </a:solidFill>
-                <a:latin typeface="Arial"/>
-                <a:ea typeface="Arial"/>
-                <a:cs typeface="Arial"/>
-              </a:rPr>
-              <a:t> : Int</a:t>
-            </a:r>
-          </a:p>
-          <a:p>
-            <a:pPr>
-              <a:defRPr sz="1275">
-                <a:solidFill>
-                  <a:srgbClr val="172033"/>
-                </a:solidFill>
-                <a:latin typeface="Arial"/>
-                <a:ea typeface="Arial"/>
-                <a:cs typeface="Arial"/>
-              </a:defRPr>
-            </a:pPr>
-            <a:r>
-              <a:rPr sz="1275" dirty="0">
-                <a:solidFill>
-                  <a:srgbClr val="172033"/>
-                </a:solidFill>
-                <a:latin typeface="Arial"/>
-                <a:ea typeface="Arial"/>
-                <a:cs typeface="Arial"/>
-              </a:rPr>
-              <a:t>  , </a:t>
-            </a:r>
-            <a:r>
-              <a:rPr sz="1275" dirty="0" err="1">
-                <a:solidFill>
-                  <a:srgbClr val="172033"/>
-                </a:solidFill>
-                <a:latin typeface="Arial"/>
-                <a:ea typeface="Arial"/>
-                <a:cs typeface="Arial"/>
-              </a:rPr>
-              <a:t>selectedPartner</a:t>
-            </a:r>
-            <a:r>
-              <a:rPr sz="1275" dirty="0">
-                <a:solidFill>
-                  <a:srgbClr val="172033"/>
-                </a:solidFill>
-                <a:latin typeface="Arial"/>
-                <a:ea typeface="Arial"/>
-                <a:cs typeface="Arial"/>
-              </a:rPr>
-              <a:t> : Maybe String</a:t>
-            </a:r>
-          </a:p>
-          <a:p>
-            <a:pPr>
-              <a:defRPr sz="1275">
-                <a:solidFill>
-                  <a:srgbClr val="172033"/>
-                </a:solidFill>
-                <a:latin typeface="Arial"/>
-                <a:ea typeface="Arial"/>
-                <a:cs typeface="Arial"/>
-              </a:defRPr>
-            </a:pPr>
-            <a:r>
-              <a:rPr sz="1275" dirty="0">
-                <a:solidFill>
-                  <a:srgbClr val="172033"/>
-                </a:solidFill>
-                <a:latin typeface="Arial"/>
-                <a:ea typeface="Arial"/>
-                <a:cs typeface="Arial"/>
-              </a:rPr>
-              <a:t>  , </a:t>
-            </a:r>
-            <a:r>
-              <a:rPr sz="1275" dirty="0" err="1">
-                <a:solidFill>
-                  <a:srgbClr val="172033"/>
-                </a:solidFill>
-                <a:latin typeface="Arial"/>
-                <a:ea typeface="Arial"/>
-                <a:cs typeface="Arial"/>
-              </a:rPr>
-              <a:t>windowStart</a:t>
-            </a:r>
-            <a:r>
-              <a:rPr sz="1275" dirty="0">
-                <a:solidFill>
-                  <a:srgbClr val="172033"/>
-                </a:solidFill>
-                <a:latin typeface="Arial"/>
-                <a:ea typeface="Arial"/>
-                <a:cs typeface="Arial"/>
-              </a:rPr>
-              <a:t> : Int</a:t>
-            </a:r>
-          </a:p>
-          <a:p>
-            <a:pPr>
-              <a:defRPr sz="1275">
-                <a:solidFill>
-                  <a:srgbClr val="172033"/>
-                </a:solidFill>
-                <a:latin typeface="Arial"/>
-                <a:ea typeface="Arial"/>
-                <a:cs typeface="Arial"/>
-              </a:defRPr>
-            </a:pPr>
-            <a:r>
-              <a:rPr sz="1275" dirty="0">
-                <a:solidFill>
-                  <a:srgbClr val="172033"/>
-                </a:solidFill>
-                <a:latin typeface="Arial"/>
-                <a:ea typeface="Arial"/>
-                <a:cs typeface="Arial"/>
-              </a:rPr>
-              <a:t>  , </a:t>
-            </a:r>
-            <a:r>
-              <a:rPr sz="1275" dirty="0" err="1">
-                <a:solidFill>
-                  <a:srgbClr val="172033"/>
-                </a:solidFill>
-                <a:latin typeface="Arial"/>
-                <a:ea typeface="Arial"/>
-                <a:cs typeface="Arial"/>
-              </a:rPr>
-              <a:t>windowSize</a:t>
-            </a:r>
-            <a:r>
-              <a:rPr sz="1275" dirty="0">
-                <a:solidFill>
-                  <a:srgbClr val="172033"/>
-                </a:solidFill>
-                <a:latin typeface="Arial"/>
-                <a:ea typeface="Arial"/>
-                <a:cs typeface="Arial"/>
-              </a:rPr>
-              <a:t> : Int</a:t>
-            </a:r>
-          </a:p>
-          <a:p>
-            <a:pPr>
-              <a:defRPr sz="1275">
-                <a:solidFill>
-                  <a:srgbClr val="172033"/>
-                </a:solidFill>
-                <a:latin typeface="Arial"/>
-                <a:ea typeface="Arial"/>
-                <a:cs typeface="Arial"/>
-              </a:defRPr>
-            </a:pPr>
-            <a:r>
-              <a:rPr sz="1275" dirty="0">
-                <a:solidFill>
-                  <a:srgbClr val="172033"/>
-                </a:solidFill>
-                <a:latin typeface="Arial"/>
-                <a:ea typeface="Arial"/>
-                <a:cs typeface="Arial"/>
-              </a:rPr>
-              <a:t>  }</a:t>
-            </a:r>
-          </a:p>
-          <a:p>
-            <a:endParaRPr sz="1275" dirty="0">
-              <a:solidFill>
-                <a:srgbClr val="172033"/>
-              </a:solidFill>
-              <a:latin typeface="Arial"/>
-              <a:ea typeface="Arial"/>
-              <a:cs typeface="Arial"/>
-            </a:endParaRPr>
-          </a:p>
-          <a:p>
-            <a:pPr>
-              <a:defRPr sz="1275">
-                <a:solidFill>
-                  <a:srgbClr val="172033"/>
-                </a:solidFill>
-                <a:latin typeface="Arial"/>
-                <a:ea typeface="Arial"/>
-                <a:cs typeface="Arial"/>
-              </a:defRPr>
-            </a:pPr>
-            <a:r>
-              <a:rPr sz="1275" dirty="0">
-                <a:solidFill>
-                  <a:srgbClr val="172033"/>
-                </a:solidFill>
-                <a:latin typeface="Arial"/>
-                <a:ea typeface="Arial"/>
-                <a:cs typeface="Arial"/>
-              </a:rPr>
-              <a:t>type Msg</a:t>
-            </a:r>
-          </a:p>
-          <a:p>
-            <a:pPr>
-              <a:defRPr sz="1275">
-                <a:solidFill>
-                  <a:srgbClr val="172033"/>
-                </a:solidFill>
-                <a:latin typeface="Arial"/>
-                <a:ea typeface="Arial"/>
-                <a:cs typeface="Arial"/>
-              </a:defRPr>
-            </a:pPr>
-            <a:r>
-              <a:rPr sz="1275" dirty="0">
-                <a:solidFill>
-                  <a:srgbClr val="172033"/>
-                </a:solidFill>
-                <a:latin typeface="Arial"/>
-                <a:ea typeface="Arial"/>
-                <a:cs typeface="Arial"/>
-              </a:rPr>
-              <a:t>  = </a:t>
-            </a:r>
-            <a:r>
-              <a:rPr sz="1275" dirty="0" err="1">
-                <a:solidFill>
-                  <a:srgbClr val="172033"/>
-                </a:solidFill>
-                <a:latin typeface="Arial"/>
-                <a:ea typeface="Arial"/>
-                <a:cs typeface="Arial"/>
-              </a:rPr>
-              <a:t>SelectPartner</a:t>
-            </a:r>
-            <a:r>
-              <a:rPr sz="1275" dirty="0">
-                <a:solidFill>
-                  <a:srgbClr val="172033"/>
-                </a:solidFill>
-                <a:latin typeface="Arial"/>
-                <a:ea typeface="Arial"/>
-                <a:cs typeface="Arial"/>
-              </a:rPr>
-              <a:t> String</a:t>
-            </a:r>
-          </a:p>
-          <a:p>
-            <a:pPr>
-              <a:defRPr sz="1275">
-                <a:solidFill>
-                  <a:srgbClr val="172033"/>
-                </a:solidFill>
-                <a:latin typeface="Arial"/>
-                <a:ea typeface="Arial"/>
-                <a:cs typeface="Arial"/>
-              </a:defRPr>
-            </a:pPr>
-            <a:r>
-              <a:rPr sz="1275" dirty="0">
-                <a:solidFill>
-                  <a:srgbClr val="172033"/>
-                </a:solidFill>
-                <a:latin typeface="Arial"/>
-                <a:ea typeface="Arial"/>
-                <a:cs typeface="Arial"/>
-              </a:rPr>
-              <a:t>  | </a:t>
-            </a:r>
-            <a:r>
-              <a:rPr sz="1275" dirty="0" err="1">
-                <a:solidFill>
-                  <a:srgbClr val="172033"/>
-                </a:solidFill>
-                <a:latin typeface="Arial"/>
-                <a:ea typeface="Arial"/>
-                <a:cs typeface="Arial"/>
-              </a:rPr>
-              <a:t>SelectTime</a:t>
-            </a:r>
-            <a:r>
-              <a:rPr sz="1275" dirty="0">
-                <a:solidFill>
-                  <a:srgbClr val="172033"/>
-                </a:solidFill>
-                <a:latin typeface="Arial"/>
-                <a:ea typeface="Arial"/>
-                <a:cs typeface="Arial"/>
-              </a:rPr>
-              <a:t> Int</a:t>
-            </a:r>
-          </a:p>
-          <a:p>
-            <a:pPr>
-              <a:defRPr sz="1275">
-                <a:solidFill>
-                  <a:srgbClr val="172033"/>
-                </a:solidFill>
-                <a:latin typeface="Arial"/>
-                <a:ea typeface="Arial"/>
-                <a:cs typeface="Arial"/>
-              </a:defRPr>
-            </a:pPr>
-            <a:r>
-              <a:rPr sz="1275" dirty="0">
-                <a:solidFill>
-                  <a:srgbClr val="172033"/>
-                </a:solidFill>
-                <a:latin typeface="Arial"/>
-                <a:ea typeface="Arial"/>
-                <a:cs typeface="Arial"/>
-              </a:rPr>
-              <a:t>  | </a:t>
-            </a:r>
-            <a:r>
-              <a:rPr sz="1275" dirty="0" err="1">
-                <a:solidFill>
-                  <a:srgbClr val="172033"/>
-                </a:solidFill>
-                <a:latin typeface="Arial"/>
-                <a:ea typeface="Arial"/>
-                <a:cs typeface="Arial"/>
-              </a:rPr>
-              <a:t>SelectCell</a:t>
-            </a:r>
-            <a:r>
-              <a:rPr sz="1275" dirty="0">
-                <a:solidFill>
-                  <a:srgbClr val="172033"/>
-                </a:solidFill>
-                <a:latin typeface="Arial"/>
-                <a:ea typeface="Arial"/>
-                <a:cs typeface="Arial"/>
-              </a:rPr>
-              <a:t> String Int</a:t>
-            </a:r>
-          </a:p>
-        </p:txBody>
-      </p:sp>
-      <p:sp>
-        <p:nvSpPr>
-          <p:cNvPr id="5" name="Rechteck 4">
-            <a:extLst>
-              <a:ext uri="{FF2B5EF4-FFF2-40B4-BE49-F238E27FC236}">
-                <a16:creationId xmlns:a16="http://schemas.microsoft.com/office/drawing/2014/main" id="{E2139BC9-9DF6-4145-B3F7-C45E26C844BB}"/>
-              </a:ext>
-            </a:extLst>
-          </p:cNvPr>
-          <p:cNvSpPr>
-            <a:spLocks noGrp="1"/>
-          </p:cNvSpPr>
-          <p:nvPr/>
-        </p:nvSpPr>
-        <p:spPr>
-          <a:xfrm>
-            <a:off x="552450" y="1123950"/>
-            <a:ext cx="4810125" cy="228600"/>
-          </a:xfrm>
-          <a:prstGeom prst="rect">
-            <a:avLst/>
-          </a:prstGeom>
-          <a:noFill/>
-          <a:ln w="0">
-            <a:noFill/>
-          </a:ln>
-        </p:spPr>
-        <p:txBody>
-          <a:bodyPr wrap="square" lIns="19050" tIns="19050" rIns="19050" bIns="19050" anchor="t">
-            <a:noAutofit/>
-          </a:bodyPr>
-          <a:lstStyle/>
-          <a:p>
-            <a:pPr algn="l">
-              <a:defRPr sz="1125" b="1">
-                <a:solidFill>
-                  <a:srgbClr val="5B6776"/>
-                </a:solidFill>
-                <a:latin typeface="Arial"/>
-                <a:ea typeface="Arial"/>
-                <a:cs typeface="Arial"/>
-              </a:defRPr>
-            </a:pPr>
-            <a:r>
-              <a:rPr sz="1125" b="1">
-                <a:solidFill>
-                  <a:srgbClr val="5B6776"/>
-                </a:solidFill>
-                <a:latin typeface="Arial"/>
-                <a:ea typeface="Arial"/>
-                <a:cs typeface="Arial"/>
-              </a:rPr>
-              <a:t>Main.elm: gemeinsamer State</a:t>
-            </a:r>
-          </a:p>
-        </p:txBody>
-      </p:sp>
-      <p:sp>
-        <p:nvSpPr>
-          <p:cNvPr id="6" name="Rechteck: abgerundete Ecken 5">
-            <a:extLst>
-              <a:ext uri="{FF2B5EF4-FFF2-40B4-BE49-F238E27FC236}">
-                <a16:creationId xmlns:a16="http://schemas.microsoft.com/office/drawing/2014/main" id="{8C4BFFD4-0D20-4283-8DB1-486ADFF11C2E}"/>
-              </a:ext>
-            </a:extLst>
-          </p:cNvPr>
-          <p:cNvSpPr>
-            <a:spLocks noGrp="1"/>
-          </p:cNvSpPr>
-          <p:nvPr/>
-        </p:nvSpPr>
-        <p:spPr>
-          <a:xfrm>
-            <a:off x="6715125" y="1381125"/>
-            <a:ext cx="4810125" cy="3429000"/>
-          </a:xfrm>
-          <a:prstGeom prst="roundRect">
-            <a:avLst>
-              <a:gd name="adj" fmla="val 3333"/>
-            </a:avLst>
-          </a:prstGeom>
-          <a:solidFill>
-            <a:srgbClr val="EEF2F7"/>
-          </a:solidFill>
-          <a:ln w="9525">
-            <a:solidFill>
-              <a:srgbClr val="CBD5E1"/>
-            </a:solidFill>
-            <a:prstDash val="solid"/>
-          </a:ln>
-        </p:spPr>
-        <p:txBody>
-          <a:bodyPr lIns="133350" tIns="114300" rIns="133350" bIns="114300" anchor="ctr">
-            <a:normAutofit/>
-          </a:bodyPr>
-          <a:lstStyle/>
-          <a:p>
-            <a:pPr>
-              <a:defRPr sz="1275">
-                <a:solidFill>
-                  <a:srgbClr val="172033"/>
-                </a:solidFill>
-                <a:latin typeface="Arial"/>
-                <a:ea typeface="Arial"/>
-                <a:cs typeface="Arial"/>
-              </a:defRPr>
-            </a:pPr>
-            <a:r>
-              <a:rPr lang="en-US" sz="1275" dirty="0" err="1">
-                <a:solidFill>
-                  <a:srgbClr val="172033"/>
-                </a:solidFill>
-                <a:latin typeface="Arial"/>
-                <a:ea typeface="Arial"/>
-                <a:cs typeface="Arial"/>
-              </a:rPr>
-              <a:t>globalIndex</a:t>
-            </a:r>
-            <a:r>
-              <a:rPr lang="en-US" sz="1275" dirty="0">
-                <a:solidFill>
-                  <a:srgbClr val="172033"/>
-                </a:solidFill>
-                <a:latin typeface="Arial"/>
-                <a:ea typeface="Arial"/>
-                <a:cs typeface="Arial"/>
-              </a:rPr>
-              <a:t> =</a:t>
-            </a:r>
-          </a:p>
-          <a:p>
-            <a:pPr>
-              <a:defRPr sz="1275">
-                <a:solidFill>
-                  <a:srgbClr val="172033"/>
-                </a:solidFill>
-                <a:latin typeface="Arial"/>
-                <a:ea typeface="Arial"/>
-                <a:cs typeface="Arial"/>
-              </a:defRPr>
-            </a:pPr>
-            <a:r>
-              <a:rPr lang="en-US" sz="1275" dirty="0">
-                <a:solidFill>
-                  <a:srgbClr val="172033"/>
-                </a:solidFill>
-                <a:latin typeface="Arial"/>
-                <a:ea typeface="Arial"/>
-                <a:cs typeface="Arial"/>
-              </a:rPr>
-              <a:t>  </a:t>
-            </a:r>
-            <a:r>
-              <a:rPr lang="en-US" sz="1275" dirty="0" err="1">
-                <a:solidFill>
-                  <a:srgbClr val="172033"/>
-                </a:solidFill>
-                <a:latin typeface="Arial"/>
-                <a:ea typeface="Arial"/>
-                <a:cs typeface="Arial"/>
-              </a:rPr>
-              <a:t>windowStart</a:t>
-            </a:r>
-            <a:r>
-              <a:rPr lang="en-US" sz="1275" dirty="0">
-                <a:solidFill>
-                  <a:srgbClr val="172033"/>
-                </a:solidFill>
-                <a:latin typeface="Arial"/>
-                <a:ea typeface="Arial"/>
-                <a:cs typeface="Arial"/>
-              </a:rPr>
-              <a:t> + </a:t>
-            </a:r>
-            <a:r>
-              <a:rPr lang="en-US" sz="1275" dirty="0" err="1">
-                <a:solidFill>
-                  <a:srgbClr val="172033"/>
-                </a:solidFill>
-                <a:latin typeface="Arial"/>
-                <a:ea typeface="Arial"/>
-                <a:cs typeface="Arial"/>
-              </a:rPr>
-              <a:t>localIndex</a:t>
-            </a:r>
-            <a:endParaRPr lang="en-US" sz="1275" dirty="0">
-              <a:solidFill>
-                <a:srgbClr val="172033"/>
-              </a:solidFill>
-              <a:latin typeface="Arial"/>
-              <a:ea typeface="Arial"/>
-              <a:cs typeface="Arial"/>
-            </a:endParaRPr>
-          </a:p>
-          <a:p>
-            <a:pPr>
-              <a:defRPr sz="1275">
-                <a:solidFill>
-                  <a:srgbClr val="172033"/>
-                </a:solidFill>
-                <a:latin typeface="Arial"/>
-                <a:ea typeface="Arial"/>
-                <a:cs typeface="Arial"/>
-              </a:defRPr>
-            </a:pPr>
-            <a:r>
-              <a:rPr lang="en-US" sz="1275" dirty="0" err="1">
-                <a:solidFill>
-                  <a:srgbClr val="172033"/>
-                </a:solidFill>
-                <a:latin typeface="Arial"/>
-                <a:ea typeface="Arial"/>
-                <a:cs typeface="Arial"/>
-              </a:rPr>
-              <a:t>onClick</a:t>
-            </a:r>
-            <a:r>
-              <a:rPr lang="en-US" sz="1275" dirty="0">
-                <a:solidFill>
-                  <a:srgbClr val="172033"/>
-                </a:solidFill>
-                <a:latin typeface="Arial"/>
-                <a:ea typeface="Arial"/>
-                <a:cs typeface="Arial"/>
-              </a:rPr>
-              <a:t> (</a:t>
-            </a:r>
-            <a:r>
-              <a:rPr lang="en-US" sz="1275" dirty="0" err="1">
-                <a:solidFill>
-                  <a:srgbClr val="172033"/>
-                </a:solidFill>
-                <a:latin typeface="Arial"/>
-                <a:ea typeface="Arial"/>
-                <a:cs typeface="Arial"/>
-              </a:rPr>
-              <a:t>SelectCell</a:t>
-            </a:r>
-            <a:r>
-              <a:rPr lang="en-US" sz="1275" dirty="0">
-                <a:solidFill>
-                  <a:srgbClr val="172033"/>
-                </a:solidFill>
-                <a:latin typeface="Arial"/>
-                <a:ea typeface="Arial"/>
-                <a:cs typeface="Arial"/>
-              </a:rPr>
-              <a:t> country </a:t>
-            </a:r>
-            <a:r>
-              <a:rPr lang="en-US" sz="1275" dirty="0" err="1">
-                <a:solidFill>
-                  <a:srgbClr val="172033"/>
-                </a:solidFill>
-                <a:latin typeface="Arial"/>
-                <a:ea typeface="Arial"/>
-                <a:cs typeface="Arial"/>
-              </a:rPr>
-              <a:t>globalIndex</a:t>
-            </a:r>
-            <a:r>
-              <a:rPr lang="en-US" sz="1275" dirty="0">
-                <a:solidFill>
-                  <a:srgbClr val="172033"/>
-                </a:solidFill>
-                <a:latin typeface="Arial"/>
-                <a:ea typeface="Arial"/>
-                <a:cs typeface="Arial"/>
-              </a:rPr>
-              <a:t>)</a:t>
-            </a:r>
-          </a:p>
-          <a:p>
-            <a:pPr>
-              <a:defRPr sz="1275">
-                <a:solidFill>
-                  <a:srgbClr val="172033"/>
-                </a:solidFill>
-                <a:latin typeface="Arial"/>
-                <a:ea typeface="Arial"/>
-                <a:cs typeface="Arial"/>
-              </a:defRPr>
-            </a:pPr>
-            <a:endParaRPr lang="de-DE" sz="1275" dirty="0">
-              <a:solidFill>
-                <a:srgbClr val="172033"/>
-              </a:solidFill>
-              <a:latin typeface="Arial"/>
-              <a:ea typeface="Arial"/>
-              <a:cs typeface="Arial"/>
-            </a:endParaRPr>
-          </a:p>
-          <a:p>
-            <a:pPr>
-              <a:defRPr sz="1275">
-                <a:solidFill>
-                  <a:srgbClr val="172033"/>
-                </a:solidFill>
-                <a:latin typeface="Arial"/>
-                <a:ea typeface="Arial"/>
-                <a:cs typeface="Arial"/>
-              </a:defRPr>
-            </a:pPr>
-            <a:endParaRPr lang="de-DE" sz="1275" dirty="0">
-              <a:solidFill>
-                <a:srgbClr val="172033"/>
-              </a:solidFill>
-              <a:latin typeface="Arial"/>
-              <a:ea typeface="Arial"/>
-              <a:cs typeface="Arial"/>
-            </a:endParaRPr>
-          </a:p>
-          <a:p>
-            <a:pPr>
-              <a:defRPr sz="1275">
-                <a:solidFill>
-                  <a:srgbClr val="172033"/>
-                </a:solidFill>
-                <a:latin typeface="Arial"/>
-                <a:ea typeface="Arial"/>
-                <a:cs typeface="Arial"/>
-              </a:defRPr>
-            </a:pPr>
-            <a:r>
-              <a:rPr sz="1275" dirty="0">
-                <a:solidFill>
-                  <a:srgbClr val="172033"/>
-                </a:solidFill>
-                <a:latin typeface="Arial"/>
-                <a:ea typeface="Arial"/>
-                <a:cs typeface="Arial"/>
-              </a:rPr>
-              <a:t>( </a:t>
-            </a:r>
-            <a:r>
-              <a:rPr sz="1275" dirty="0" err="1">
-                <a:solidFill>
-                  <a:srgbClr val="172033"/>
-                </a:solidFill>
-                <a:latin typeface="Arial"/>
-                <a:ea typeface="Arial"/>
-                <a:cs typeface="Arial"/>
-              </a:rPr>
-              <a:t>SelectCell</a:t>
-            </a:r>
-            <a:r>
-              <a:rPr sz="1275" dirty="0">
-                <a:solidFill>
-                  <a:srgbClr val="172033"/>
-                </a:solidFill>
-                <a:latin typeface="Arial"/>
-                <a:ea typeface="Arial"/>
-                <a:cs typeface="Arial"/>
-              </a:rPr>
-              <a:t> country </a:t>
-            </a:r>
-            <a:r>
-              <a:rPr lang="de-DE" sz="1275" dirty="0" err="1">
-                <a:solidFill>
-                  <a:srgbClr val="172033"/>
-                </a:solidFill>
-                <a:latin typeface="Arial"/>
-                <a:ea typeface="Arial"/>
-                <a:cs typeface="Arial"/>
-              </a:rPr>
-              <a:t>globalIndex</a:t>
-            </a:r>
-            <a:r>
-              <a:rPr sz="1275" dirty="0">
-                <a:solidFill>
-                  <a:srgbClr val="172033"/>
-                </a:solidFill>
-                <a:latin typeface="Arial"/>
-                <a:ea typeface="Arial"/>
-                <a:cs typeface="Arial"/>
-              </a:rPr>
-              <a:t>, Ready state ) -&gt;</a:t>
-            </a:r>
-          </a:p>
-          <a:p>
-            <a:pPr>
-              <a:defRPr sz="1275">
-                <a:solidFill>
-                  <a:srgbClr val="172033"/>
-                </a:solidFill>
-                <a:latin typeface="Arial"/>
-                <a:ea typeface="Arial"/>
-                <a:cs typeface="Arial"/>
-              </a:defRPr>
-            </a:pPr>
-            <a:r>
-              <a:rPr sz="1275" dirty="0">
-                <a:solidFill>
-                  <a:srgbClr val="172033"/>
-                </a:solidFill>
-                <a:latin typeface="Arial"/>
-                <a:ea typeface="Arial"/>
-                <a:cs typeface="Arial"/>
-              </a:rPr>
-              <a:t>  Ready</a:t>
-            </a:r>
-          </a:p>
-          <a:p>
-            <a:pPr>
-              <a:defRPr sz="1275">
-                <a:solidFill>
-                  <a:srgbClr val="172033"/>
-                </a:solidFill>
-                <a:latin typeface="Arial"/>
-                <a:ea typeface="Arial"/>
-                <a:cs typeface="Arial"/>
-              </a:defRPr>
-            </a:pPr>
-            <a:r>
-              <a:rPr sz="1275" dirty="0">
-                <a:solidFill>
-                  <a:srgbClr val="172033"/>
-                </a:solidFill>
-                <a:latin typeface="Arial"/>
-                <a:ea typeface="Arial"/>
-                <a:cs typeface="Arial"/>
-              </a:rPr>
-              <a:t>    { state</a:t>
-            </a:r>
-          </a:p>
-          <a:p>
-            <a:pPr>
-              <a:defRPr sz="1275">
-                <a:solidFill>
-                  <a:srgbClr val="172033"/>
-                </a:solidFill>
-                <a:latin typeface="Arial"/>
-                <a:ea typeface="Arial"/>
-                <a:cs typeface="Arial"/>
-              </a:defRPr>
-            </a:pPr>
-            <a:r>
-              <a:rPr sz="1275" dirty="0">
-                <a:solidFill>
-                  <a:srgbClr val="172033"/>
-                </a:solidFill>
-                <a:latin typeface="Arial"/>
-                <a:ea typeface="Arial"/>
-                <a:cs typeface="Arial"/>
-              </a:rPr>
-              <a:t>        | </a:t>
-            </a:r>
-            <a:r>
-              <a:rPr sz="1275" dirty="0" err="1">
-                <a:solidFill>
-                  <a:srgbClr val="172033"/>
-                </a:solidFill>
-                <a:latin typeface="Arial"/>
-                <a:ea typeface="Arial"/>
-                <a:cs typeface="Arial"/>
-              </a:rPr>
-              <a:t>selectedPartner</a:t>
-            </a:r>
-            <a:r>
-              <a:rPr sz="1275" dirty="0">
-                <a:solidFill>
-                  <a:srgbClr val="172033"/>
-                </a:solidFill>
-                <a:latin typeface="Arial"/>
-                <a:ea typeface="Arial"/>
-                <a:cs typeface="Arial"/>
-              </a:rPr>
-              <a:t> = Just country</a:t>
-            </a:r>
-          </a:p>
-          <a:p>
-            <a:pPr>
-              <a:defRPr sz="1275">
-                <a:solidFill>
-                  <a:srgbClr val="172033"/>
-                </a:solidFill>
-                <a:latin typeface="Arial"/>
-                <a:ea typeface="Arial"/>
-                <a:cs typeface="Arial"/>
-              </a:defRPr>
-            </a:pPr>
-            <a:r>
-              <a:rPr sz="1275" dirty="0">
-                <a:solidFill>
-                  <a:srgbClr val="172033"/>
-                </a:solidFill>
-                <a:latin typeface="Arial"/>
-                <a:ea typeface="Arial"/>
-                <a:cs typeface="Arial"/>
-              </a:rPr>
-              <a:t>        , </a:t>
-            </a:r>
-            <a:r>
-              <a:rPr sz="1275" dirty="0" err="1">
-                <a:solidFill>
-                  <a:srgbClr val="172033"/>
-                </a:solidFill>
-                <a:latin typeface="Arial"/>
-                <a:ea typeface="Arial"/>
-                <a:cs typeface="Arial"/>
-              </a:rPr>
-              <a:t>selectedIndex</a:t>
-            </a:r>
-            <a:r>
-              <a:rPr sz="1275" dirty="0">
-                <a:solidFill>
-                  <a:srgbClr val="172033"/>
-                </a:solidFill>
-                <a:latin typeface="Arial"/>
-                <a:ea typeface="Arial"/>
-                <a:cs typeface="Arial"/>
-              </a:rPr>
-              <a:t> = </a:t>
-            </a:r>
-            <a:r>
-              <a:rPr lang="de-DE" sz="1275" dirty="0" err="1">
-                <a:solidFill>
-                  <a:srgbClr val="172033"/>
-                </a:solidFill>
-                <a:latin typeface="Arial"/>
-                <a:ea typeface="Arial"/>
-                <a:cs typeface="Arial"/>
-              </a:rPr>
-              <a:t>gloablI</a:t>
-            </a:r>
-            <a:r>
-              <a:rPr sz="1275" dirty="0" err="1">
-                <a:solidFill>
-                  <a:srgbClr val="172033"/>
-                </a:solidFill>
-                <a:latin typeface="Arial"/>
-                <a:ea typeface="Arial"/>
-                <a:cs typeface="Arial"/>
-              </a:rPr>
-              <a:t>ndex</a:t>
-            </a:r>
-            <a:endParaRPr sz="1275" dirty="0">
-              <a:solidFill>
-                <a:srgbClr val="172033"/>
-              </a:solidFill>
-              <a:latin typeface="Arial"/>
-              <a:ea typeface="Arial"/>
-              <a:cs typeface="Arial"/>
-            </a:endParaRPr>
-          </a:p>
-          <a:p>
-            <a:pPr>
-              <a:defRPr sz="1275">
-                <a:solidFill>
-                  <a:srgbClr val="172033"/>
-                </a:solidFill>
-                <a:latin typeface="Arial"/>
-                <a:ea typeface="Arial"/>
-                <a:cs typeface="Arial"/>
-              </a:defRPr>
-            </a:pPr>
-            <a:r>
-              <a:rPr sz="1275" dirty="0">
-                <a:solidFill>
-                  <a:srgbClr val="172033"/>
-                </a:solidFill>
-                <a:latin typeface="Arial"/>
-                <a:ea typeface="Arial"/>
-                <a:cs typeface="Arial"/>
-              </a:rPr>
-              <a:t>    }</a:t>
-            </a:r>
-          </a:p>
-          <a:p>
-            <a:endParaRPr sz="1275" dirty="0">
-              <a:solidFill>
-                <a:srgbClr val="172033"/>
-              </a:solidFill>
-              <a:latin typeface="Arial"/>
-              <a:ea typeface="Arial"/>
-              <a:cs typeface="Arial"/>
-            </a:endParaRPr>
-          </a:p>
-          <a:p>
-            <a:pPr>
-              <a:defRPr sz="1275">
-                <a:solidFill>
-                  <a:srgbClr val="172033"/>
-                </a:solidFill>
-                <a:latin typeface="Arial"/>
-                <a:ea typeface="Arial"/>
-                <a:cs typeface="Arial"/>
-              </a:defRPr>
-            </a:pPr>
-            <a:endParaRPr sz="1275" dirty="0">
-              <a:solidFill>
-                <a:srgbClr val="172033"/>
-              </a:solidFill>
-              <a:latin typeface="Arial"/>
-              <a:ea typeface="Arial"/>
-              <a:cs typeface="Arial"/>
-            </a:endParaRPr>
-          </a:p>
-        </p:txBody>
-      </p:sp>
-      <p:sp>
-        <p:nvSpPr>
-          <p:cNvPr id="7" name="Rechteck 6">
-            <a:extLst>
-              <a:ext uri="{FF2B5EF4-FFF2-40B4-BE49-F238E27FC236}">
-                <a16:creationId xmlns:a16="http://schemas.microsoft.com/office/drawing/2014/main" id="{FDFD5749-0289-4609-8A7C-CD684D9EFE3A}"/>
-              </a:ext>
-            </a:extLst>
-          </p:cNvPr>
-          <p:cNvSpPr>
-            <a:spLocks noGrp="1"/>
-          </p:cNvSpPr>
-          <p:nvPr/>
-        </p:nvSpPr>
-        <p:spPr>
-          <a:xfrm>
-            <a:off x="6715125" y="1123950"/>
-            <a:ext cx="4810125" cy="228600"/>
-          </a:xfrm>
-          <a:prstGeom prst="rect">
-            <a:avLst/>
-          </a:prstGeom>
-          <a:noFill/>
-          <a:ln w="0">
-            <a:noFill/>
-          </a:ln>
-        </p:spPr>
-        <p:txBody>
-          <a:bodyPr wrap="square" lIns="19050" tIns="19050" rIns="19050" bIns="19050" anchor="t">
-            <a:noAutofit/>
-          </a:bodyPr>
-          <a:lstStyle/>
-          <a:p>
-            <a:pPr algn="l">
-              <a:defRPr sz="1125" b="1">
-                <a:solidFill>
-                  <a:srgbClr val="5B6776"/>
-                </a:solidFill>
-                <a:latin typeface="Arial"/>
-                <a:ea typeface="Arial"/>
-                <a:cs typeface="Arial"/>
-              </a:defRPr>
-            </a:pPr>
-            <a:r>
-              <a:rPr sz="1125" b="1">
-                <a:solidFill>
-                  <a:srgbClr val="5B6776"/>
-                </a:solidFill>
-                <a:latin typeface="Arial"/>
-                <a:ea typeface="Arial"/>
-                <a:cs typeface="Arial"/>
-              </a:rPr>
-              <a:t>Matrixklick und Indexumrechnung</a:t>
-            </a:r>
-          </a:p>
-        </p:txBody>
-      </p:sp>
-      <p:sp>
-        <p:nvSpPr>
-          <p:cNvPr id="8" name="Ellipse 7">
-            <a:extLst>
-              <a:ext uri="{FF2B5EF4-FFF2-40B4-BE49-F238E27FC236}">
-                <a16:creationId xmlns:a16="http://schemas.microsoft.com/office/drawing/2014/main" id="{81ABCE13-C31D-4513-92D2-BECDF410F2A5}"/>
-              </a:ext>
-            </a:extLst>
-          </p:cNvPr>
-          <p:cNvSpPr>
-            <a:spLocks noGrp="1"/>
-          </p:cNvSpPr>
-          <p:nvPr/>
-        </p:nvSpPr>
-        <p:spPr>
-          <a:xfrm>
-            <a:off x="1238250" y="5286375"/>
-            <a:ext cx="495300" cy="495300"/>
-          </a:xfrm>
-          <a:prstGeom prst="ellipse">
-            <a:avLst/>
-          </a:prstGeom>
-          <a:solidFill>
-            <a:srgbClr val="2F6DB2"/>
-          </a:solidFill>
-          <a:ln w="0">
-            <a:noFill/>
-          </a:ln>
-        </p:spPr>
-      </p:sp>
-      <p:sp>
-        <p:nvSpPr>
-          <p:cNvPr id="9" name="Rechteck 8">
-            <a:extLst>
-              <a:ext uri="{FF2B5EF4-FFF2-40B4-BE49-F238E27FC236}">
-                <a16:creationId xmlns:a16="http://schemas.microsoft.com/office/drawing/2014/main" id="{69BD0EE9-9D9B-4A88-9D36-4CA0268B0458}"/>
-              </a:ext>
-            </a:extLst>
-          </p:cNvPr>
-          <p:cNvSpPr>
-            <a:spLocks noGrp="1"/>
-          </p:cNvSpPr>
-          <p:nvPr/>
-        </p:nvSpPr>
-        <p:spPr>
-          <a:xfrm>
-            <a:off x="1238250" y="5381625"/>
-            <a:ext cx="495300" cy="285750"/>
-          </a:xfrm>
-          <a:prstGeom prst="rect">
-            <a:avLst/>
-          </a:prstGeom>
-          <a:noFill/>
-          <a:ln w="0">
-            <a:noFill/>
-          </a:ln>
-        </p:spPr>
-        <p:txBody>
-          <a:bodyPr wrap="square" lIns="19050" tIns="19050" rIns="19050" bIns="19050" anchor="t">
-            <a:noAutofit/>
-          </a:bodyPr>
-          <a:lstStyle/>
-          <a:p>
-            <a:pPr algn="ctr">
-              <a:defRPr sz="1650" b="1">
-                <a:solidFill>
-                  <a:srgbClr val="FFFFFF"/>
-                </a:solidFill>
-                <a:latin typeface="Arial"/>
-                <a:ea typeface="Arial"/>
-                <a:cs typeface="Arial"/>
-              </a:defRPr>
-            </a:pPr>
-            <a:r>
-              <a:rPr sz="1650" b="1">
-                <a:solidFill>
-                  <a:srgbClr val="FFFFFF"/>
-                </a:solidFill>
-                <a:latin typeface="Arial"/>
-                <a:ea typeface="Arial"/>
-                <a:cs typeface="Arial"/>
-              </a:rPr>
-              <a:t>1</a:t>
-            </a:r>
-          </a:p>
-        </p:txBody>
-      </p:sp>
-      <p:sp>
-        <p:nvSpPr>
-          <p:cNvPr id="10" name="Rechteck 9">
-            <a:extLst>
-              <a:ext uri="{FF2B5EF4-FFF2-40B4-BE49-F238E27FC236}">
-                <a16:creationId xmlns:a16="http://schemas.microsoft.com/office/drawing/2014/main" id="{33C7FEEB-78D8-4E50-AB80-EB6EF4A42238}"/>
-              </a:ext>
-            </a:extLst>
-          </p:cNvPr>
-          <p:cNvSpPr>
-            <a:spLocks noGrp="1"/>
-          </p:cNvSpPr>
-          <p:nvPr/>
-        </p:nvSpPr>
-        <p:spPr>
-          <a:xfrm>
-            <a:off x="1847850" y="5305425"/>
-            <a:ext cx="2238375" cy="457200"/>
-          </a:xfrm>
-          <a:prstGeom prst="rect">
-            <a:avLst/>
-          </a:prstGeom>
-          <a:noFill/>
-          <a:ln w="0">
-            <a:noFill/>
-          </a:ln>
-        </p:spPr>
-        <p:txBody>
-          <a:bodyPr wrap="square" lIns="19050" tIns="19050" rIns="19050" bIns="19050" anchor="ctr">
-            <a:normAutofit/>
-          </a:bodyPr>
-          <a:lstStyle/>
-          <a:p>
-            <a:pPr algn="l">
-              <a:defRPr sz="1350" b="1">
-                <a:solidFill>
-                  <a:srgbClr val="19324A"/>
-                </a:solidFill>
-                <a:latin typeface="Arial"/>
-                <a:ea typeface="Arial"/>
-                <a:cs typeface="Arial"/>
-              </a:defRPr>
-            </a:pPr>
-            <a:r>
-              <a:rPr sz="1350" b="1">
-                <a:solidFill>
-                  <a:srgbClr val="19324A"/>
-                </a:solidFill>
-                <a:latin typeface="Arial"/>
-                <a:ea typeface="Arial"/>
-                <a:cs typeface="Arial"/>
-              </a:rPr>
-              <a:t>Klick erzeugt Msg</a:t>
-            </a:r>
-          </a:p>
-        </p:txBody>
-      </p:sp>
-      <p:sp>
-        <p:nvSpPr>
-          <p:cNvPr id="11" name="Ellipse 10">
-            <a:extLst>
-              <a:ext uri="{FF2B5EF4-FFF2-40B4-BE49-F238E27FC236}">
-                <a16:creationId xmlns:a16="http://schemas.microsoft.com/office/drawing/2014/main" id="{E6E5EDB8-777D-4F31-93D8-8B76B627A0A7}"/>
-              </a:ext>
-            </a:extLst>
-          </p:cNvPr>
-          <p:cNvSpPr>
-            <a:spLocks noGrp="1"/>
-          </p:cNvSpPr>
-          <p:nvPr/>
-        </p:nvSpPr>
-        <p:spPr>
-          <a:xfrm>
-            <a:off x="4667250" y="5286375"/>
-            <a:ext cx="495300" cy="495300"/>
-          </a:xfrm>
-          <a:prstGeom prst="ellipse">
-            <a:avLst/>
-          </a:prstGeom>
-          <a:solidFill>
-            <a:srgbClr val="F2C94C"/>
-          </a:solidFill>
-          <a:ln w="0">
-            <a:noFill/>
-          </a:ln>
-        </p:spPr>
-      </p:sp>
-      <p:sp>
-        <p:nvSpPr>
-          <p:cNvPr id="12" name="Rechteck 11">
-            <a:extLst>
-              <a:ext uri="{FF2B5EF4-FFF2-40B4-BE49-F238E27FC236}">
-                <a16:creationId xmlns:a16="http://schemas.microsoft.com/office/drawing/2014/main" id="{F4AD4A58-09FE-41A2-BCCF-2A0FEBA0D6F5}"/>
-              </a:ext>
-            </a:extLst>
-          </p:cNvPr>
-          <p:cNvSpPr>
-            <a:spLocks noGrp="1"/>
-          </p:cNvSpPr>
-          <p:nvPr/>
-        </p:nvSpPr>
-        <p:spPr>
-          <a:xfrm>
-            <a:off x="4667250" y="5381625"/>
-            <a:ext cx="495300" cy="285750"/>
-          </a:xfrm>
-          <a:prstGeom prst="rect">
-            <a:avLst/>
-          </a:prstGeom>
-          <a:noFill/>
-          <a:ln w="0">
-            <a:noFill/>
-          </a:ln>
-        </p:spPr>
-        <p:txBody>
-          <a:bodyPr wrap="square" lIns="19050" tIns="19050" rIns="19050" bIns="19050" anchor="t">
-            <a:noAutofit/>
-          </a:bodyPr>
-          <a:lstStyle/>
-          <a:p>
-            <a:pPr algn="ctr">
-              <a:defRPr sz="1650" b="1">
-                <a:solidFill>
-                  <a:srgbClr val="182433"/>
-                </a:solidFill>
-                <a:latin typeface="Arial"/>
-                <a:ea typeface="Arial"/>
-                <a:cs typeface="Arial"/>
-              </a:defRPr>
-            </a:pPr>
-            <a:r>
-              <a:rPr sz="1650" b="1">
-                <a:solidFill>
-                  <a:srgbClr val="182433"/>
-                </a:solidFill>
-                <a:latin typeface="Arial"/>
-                <a:ea typeface="Arial"/>
-                <a:cs typeface="Arial"/>
-              </a:rPr>
-              <a:t>2</a:t>
-            </a:r>
-          </a:p>
-        </p:txBody>
-      </p:sp>
-      <p:sp>
-        <p:nvSpPr>
-          <p:cNvPr id="13" name="Rechteck 12">
-            <a:extLst>
-              <a:ext uri="{FF2B5EF4-FFF2-40B4-BE49-F238E27FC236}">
-                <a16:creationId xmlns:a16="http://schemas.microsoft.com/office/drawing/2014/main" id="{2237D4BF-4AA9-416B-A2F4-5A4C44A46ABA}"/>
-              </a:ext>
-            </a:extLst>
-          </p:cNvPr>
-          <p:cNvSpPr>
-            <a:spLocks noGrp="1"/>
-          </p:cNvSpPr>
-          <p:nvPr/>
-        </p:nvSpPr>
-        <p:spPr>
-          <a:xfrm>
-            <a:off x="5276850" y="5305425"/>
-            <a:ext cx="2238375" cy="457200"/>
-          </a:xfrm>
-          <a:prstGeom prst="rect">
-            <a:avLst/>
-          </a:prstGeom>
-          <a:noFill/>
-          <a:ln w="0">
-            <a:noFill/>
-          </a:ln>
-        </p:spPr>
-        <p:txBody>
-          <a:bodyPr wrap="square" lIns="19050" tIns="19050" rIns="19050" bIns="19050" anchor="ctr">
-            <a:normAutofit/>
-          </a:bodyPr>
-          <a:lstStyle/>
-          <a:p>
-            <a:pPr algn="l">
-              <a:defRPr sz="1350" b="1">
-                <a:solidFill>
-                  <a:srgbClr val="19324A"/>
-                </a:solidFill>
-                <a:latin typeface="Arial"/>
-                <a:ea typeface="Arial"/>
-                <a:cs typeface="Arial"/>
-              </a:defRPr>
-            </a:pPr>
-            <a:r>
-              <a:rPr sz="1350" b="1">
-                <a:solidFill>
-                  <a:srgbClr val="19324A"/>
-                </a:solidFill>
-                <a:latin typeface="Arial"/>
-                <a:ea typeface="Arial"/>
-                <a:cs typeface="Arial"/>
-              </a:rPr>
-              <a:t>update erzeugt neuen State</a:t>
-            </a:r>
-          </a:p>
-        </p:txBody>
-      </p:sp>
-      <p:sp>
-        <p:nvSpPr>
-          <p:cNvPr id="14" name="Ellipse 13">
-            <a:extLst>
-              <a:ext uri="{FF2B5EF4-FFF2-40B4-BE49-F238E27FC236}">
-                <a16:creationId xmlns:a16="http://schemas.microsoft.com/office/drawing/2014/main" id="{5F2BF842-306B-40FC-9609-6EB56A957F06}"/>
-              </a:ext>
-            </a:extLst>
-          </p:cNvPr>
-          <p:cNvSpPr>
-            <a:spLocks noGrp="1"/>
-          </p:cNvSpPr>
-          <p:nvPr/>
-        </p:nvSpPr>
-        <p:spPr>
-          <a:xfrm>
-            <a:off x="8096250" y="5286375"/>
-            <a:ext cx="495300" cy="495300"/>
-          </a:xfrm>
-          <a:prstGeom prst="ellipse">
-            <a:avLst/>
-          </a:prstGeom>
-          <a:solidFill>
-            <a:srgbClr val="7C3AED"/>
-          </a:solidFill>
-          <a:ln w="0">
-            <a:noFill/>
-          </a:ln>
-        </p:spPr>
-      </p:sp>
-      <p:sp>
-        <p:nvSpPr>
-          <p:cNvPr id="15" name="Rechteck 14">
-            <a:extLst>
-              <a:ext uri="{FF2B5EF4-FFF2-40B4-BE49-F238E27FC236}">
-                <a16:creationId xmlns:a16="http://schemas.microsoft.com/office/drawing/2014/main" id="{FA986551-08D5-4022-838A-A09812E73567}"/>
-              </a:ext>
-            </a:extLst>
-          </p:cNvPr>
-          <p:cNvSpPr>
-            <a:spLocks noGrp="1"/>
-          </p:cNvSpPr>
-          <p:nvPr/>
-        </p:nvSpPr>
-        <p:spPr>
-          <a:xfrm>
-            <a:off x="8096250" y="5381625"/>
-            <a:ext cx="495300" cy="285750"/>
-          </a:xfrm>
-          <a:prstGeom prst="rect">
-            <a:avLst/>
-          </a:prstGeom>
-          <a:noFill/>
-          <a:ln w="0">
-            <a:noFill/>
-          </a:ln>
-        </p:spPr>
-        <p:txBody>
-          <a:bodyPr wrap="square" lIns="19050" tIns="19050" rIns="19050" bIns="19050" anchor="t">
-            <a:noAutofit/>
-          </a:bodyPr>
-          <a:lstStyle/>
-          <a:p>
-            <a:pPr algn="ctr">
-              <a:defRPr sz="1650" b="1">
-                <a:solidFill>
-                  <a:srgbClr val="FFFFFF"/>
-                </a:solidFill>
-                <a:latin typeface="Arial"/>
-                <a:ea typeface="Arial"/>
-                <a:cs typeface="Arial"/>
-              </a:defRPr>
-            </a:pPr>
-            <a:r>
-              <a:rPr sz="1650" b="1">
-                <a:solidFill>
-                  <a:srgbClr val="FFFFFF"/>
-                </a:solidFill>
-                <a:latin typeface="Arial"/>
-                <a:ea typeface="Arial"/>
-                <a:cs typeface="Arial"/>
-              </a:rPr>
-              <a:t>3</a:t>
-            </a:r>
-          </a:p>
-        </p:txBody>
-      </p:sp>
-      <p:sp>
-        <p:nvSpPr>
-          <p:cNvPr id="16" name="Rechteck 15">
-            <a:extLst>
-              <a:ext uri="{FF2B5EF4-FFF2-40B4-BE49-F238E27FC236}">
-                <a16:creationId xmlns:a16="http://schemas.microsoft.com/office/drawing/2014/main" id="{5C404F76-105E-4E1E-95B3-E29ACC1F2389}"/>
-              </a:ext>
-            </a:extLst>
-          </p:cNvPr>
-          <p:cNvSpPr>
-            <a:spLocks noGrp="1"/>
-          </p:cNvSpPr>
-          <p:nvPr/>
-        </p:nvSpPr>
-        <p:spPr>
-          <a:xfrm>
-            <a:off x="8705850" y="5305425"/>
-            <a:ext cx="2238375" cy="457200"/>
-          </a:xfrm>
-          <a:prstGeom prst="rect">
-            <a:avLst/>
-          </a:prstGeom>
-          <a:noFill/>
-          <a:ln w="0">
-            <a:noFill/>
-          </a:ln>
-        </p:spPr>
-        <p:txBody>
-          <a:bodyPr wrap="square" lIns="19050" tIns="19050" rIns="19050" bIns="19050" anchor="ctr">
-            <a:normAutofit/>
-          </a:bodyPr>
-          <a:lstStyle/>
-          <a:p>
-            <a:pPr algn="l">
-              <a:defRPr sz="1350" b="1">
-                <a:solidFill>
-                  <a:srgbClr val="19324A"/>
-                </a:solidFill>
-                <a:latin typeface="Arial"/>
-                <a:ea typeface="Arial"/>
-                <a:cs typeface="Arial"/>
-              </a:defRPr>
-            </a:pPr>
-            <a:r>
-              <a:rPr sz="1350" b="1">
-                <a:solidFill>
-                  <a:srgbClr val="19324A"/>
-                </a:solidFill>
-                <a:latin typeface="Arial"/>
-                <a:ea typeface="Arial"/>
-                <a:cs typeface="Arial"/>
-              </a:rPr>
-              <a:t>view rendert alle Ansichten</a:t>
-            </a:r>
-          </a:p>
-        </p:txBody>
-      </p:sp>
-      <p:sp>
-        <p:nvSpPr>
-          <p:cNvPr id="17" name="Rechteck 16">
-            <a:extLst>
-              <a:ext uri="{FF2B5EF4-FFF2-40B4-BE49-F238E27FC236}">
-                <a16:creationId xmlns:a16="http://schemas.microsoft.com/office/drawing/2014/main" id="{783DBC25-0314-446A-8019-2905141A0FC0}"/>
-              </a:ext>
-            </a:extLst>
-          </p:cNvPr>
-          <p:cNvSpPr>
-            <a:spLocks noGrp="1"/>
-          </p:cNvSpPr>
-          <p:nvPr/>
-        </p:nvSpPr>
-        <p:spPr>
-          <a:xfrm>
-            <a:off x="552450" y="6486525"/>
-            <a:ext cx="5715000" cy="209550"/>
-          </a:xfrm>
-          <a:prstGeom prst="rect">
-            <a:avLst/>
-          </a:prstGeom>
-          <a:noFill/>
-          <a:ln w="0">
-            <a:noFill/>
-          </a:ln>
-        </p:spPr>
-        <p:txBody>
-          <a:bodyPr wrap="square" lIns="19050" tIns="19050" rIns="19050" bIns="19050" anchor="t">
-            <a:noAutofit/>
-          </a:bodyPr>
-          <a:lstStyle/>
-          <a:p>
-            <a:pPr algn="l">
-              <a:defRPr sz="900" b="0">
-                <a:solidFill>
-                  <a:srgbClr val="5B6776"/>
-                </a:solidFill>
-                <a:latin typeface="Arial"/>
-                <a:ea typeface="Arial"/>
-                <a:cs typeface="Arial"/>
-              </a:defRPr>
-            </a:pPr>
-            <a:r>
-              <a:rPr sz="900" b="0">
-                <a:solidFill>
-                  <a:srgbClr val="5B6776"/>
-                </a:solidFill>
-                <a:latin typeface="Arial"/>
-                <a:ea typeface="Arial"/>
-                <a:cs typeface="Arial"/>
-              </a:rPr>
-              <a:t>Informationsvisualisierung · Jann Körner</a:t>
-            </a:r>
-          </a:p>
-        </p:txBody>
-      </p:sp>
-    </p:spTree>
-    <p:extLst>
-      <p:ext uri="{BB962C8B-B14F-4D97-AF65-F5344CB8AC3E}">
-        <p14:creationId xmlns:p14="http://schemas.microsoft.com/office/powerpoint/2010/main" val="1717610975"/>
-      </p:ext>
-    </p:extLst>
-  </p:cSld>
-  <p:clrMapOvr>
-    <a:masterClrMapping/>
-  </p:clrMapOvr>
-</p:sld>
-</file>
-
-<file path=ppt/slides/slide14.xml><?xml version="1.0" encoding="utf-8"?>
-<p:sld xmlns:a="http://schemas.openxmlformats.org/drawingml/2006/main" xmlns:r="http://schemas.openxmlformats.org/officeDocument/2006/relationships" xmlns:p="http://schemas.openxmlformats.org/presentationml/2006/main">
-  <p:cSld>
-    <p:bg>
-      <p:bgPr>
-        <a:solidFill>
           <a:srgbClr val="19324A"/>
         </a:solidFill>
         <a:effectLst/>
@@ -7181,7 +5317,7 @@
               </a:defRPr>
             </a:pPr>
             <a:r>
-              <a:rPr sz="1950">
+              <a:rPr sz="1950" dirty="0">
                 <a:solidFill>
                   <a:srgbClr val="FFFFFF"/>
                 </a:solidFill>
@@ -7189,7 +5325,161 @@
                 <a:ea typeface="Arial"/>
                 <a:cs typeface="Arial"/>
               </a:rPr>
-              <a:t>Der Netzwerkgraph zeigt Richtung und Stärke der Länderflüsse für eine Stunde.</a:t>
+              <a:t>Der </a:t>
+            </a:r>
+            <a:r>
+              <a:rPr sz="1950" dirty="0" err="1">
+                <a:solidFill>
+                  <a:srgbClr val="FFFFFF"/>
+                </a:solidFill>
+                <a:latin typeface="Arial"/>
+                <a:ea typeface="Arial"/>
+                <a:cs typeface="Arial"/>
+              </a:rPr>
+              <a:t>Netzwerkgraph</a:t>
+            </a:r>
+            <a:r>
+              <a:rPr sz="1950" dirty="0">
+                <a:solidFill>
+                  <a:srgbClr val="FFFFFF"/>
+                </a:solidFill>
+                <a:latin typeface="Arial"/>
+                <a:ea typeface="Arial"/>
+                <a:cs typeface="Arial"/>
+              </a:rPr>
+              <a:t> </a:t>
+            </a:r>
+            <a:r>
+              <a:rPr sz="1950" dirty="0" err="1">
+                <a:solidFill>
+                  <a:srgbClr val="FFFFFF"/>
+                </a:solidFill>
+                <a:latin typeface="Arial"/>
+                <a:ea typeface="Arial"/>
+                <a:cs typeface="Arial"/>
+              </a:rPr>
+              <a:t>zeigt</a:t>
+            </a:r>
+            <a:r>
+              <a:rPr sz="1950" dirty="0">
+                <a:solidFill>
+                  <a:srgbClr val="FFFFFF"/>
+                </a:solidFill>
+                <a:latin typeface="Arial"/>
+                <a:ea typeface="Arial"/>
+                <a:cs typeface="Arial"/>
+              </a:rPr>
+              <a:t> </a:t>
+            </a:r>
+            <a:r>
+              <a:rPr sz="1950" dirty="0" err="1">
+                <a:solidFill>
+                  <a:srgbClr val="FFFFFF"/>
+                </a:solidFill>
+                <a:latin typeface="Arial"/>
+                <a:ea typeface="Arial"/>
+                <a:cs typeface="Arial"/>
+              </a:rPr>
+              <a:t>Richtung</a:t>
+            </a:r>
+            <a:r>
+              <a:rPr sz="1950" dirty="0">
+                <a:solidFill>
+                  <a:srgbClr val="FFFFFF"/>
+                </a:solidFill>
+                <a:latin typeface="Arial"/>
+                <a:ea typeface="Arial"/>
+                <a:cs typeface="Arial"/>
+              </a:rPr>
+              <a:t> und </a:t>
+            </a:r>
+            <a:r>
+              <a:rPr sz="1950" dirty="0" err="1">
+                <a:solidFill>
+                  <a:srgbClr val="FFFFFF"/>
+                </a:solidFill>
+                <a:latin typeface="Arial"/>
+                <a:ea typeface="Arial"/>
+                <a:cs typeface="Arial"/>
+              </a:rPr>
+              <a:t>Stärke</a:t>
+            </a:r>
+            <a:r>
+              <a:rPr sz="1950" dirty="0">
+                <a:solidFill>
+                  <a:srgbClr val="FFFFFF"/>
+                </a:solidFill>
+                <a:latin typeface="Arial"/>
+                <a:ea typeface="Arial"/>
+                <a:cs typeface="Arial"/>
+              </a:rPr>
+              <a:t> der </a:t>
+            </a:r>
+            <a:r>
+              <a:rPr sz="1950" dirty="0" err="1">
+                <a:solidFill>
+                  <a:srgbClr val="FFFFFF"/>
+                </a:solidFill>
+                <a:latin typeface="Arial"/>
+                <a:ea typeface="Arial"/>
+                <a:cs typeface="Arial"/>
+              </a:rPr>
+              <a:t>Länderflüsse</a:t>
+            </a:r>
+            <a:r>
+              <a:rPr sz="1950" dirty="0">
+                <a:solidFill>
+                  <a:srgbClr val="FFFFFF"/>
+                </a:solidFill>
+                <a:latin typeface="Arial"/>
+                <a:ea typeface="Arial"/>
+                <a:cs typeface="Arial"/>
+              </a:rPr>
+              <a:t> für </a:t>
+            </a:r>
+            <a:r>
+              <a:rPr sz="1950" dirty="0" err="1">
+                <a:solidFill>
+                  <a:srgbClr val="FFFFFF"/>
+                </a:solidFill>
+                <a:latin typeface="Arial"/>
+                <a:ea typeface="Arial"/>
+                <a:cs typeface="Arial"/>
+              </a:rPr>
+              <a:t>eine</a:t>
+            </a:r>
+            <a:r>
+              <a:rPr sz="1950" dirty="0">
+                <a:solidFill>
+                  <a:srgbClr val="FFFFFF"/>
+                </a:solidFill>
+                <a:latin typeface="Arial"/>
+                <a:ea typeface="Arial"/>
+                <a:cs typeface="Arial"/>
+              </a:rPr>
+              <a:t> </a:t>
+            </a:r>
+            <a:r>
+              <a:rPr sz="1950" dirty="0" err="1">
+                <a:solidFill>
+                  <a:srgbClr val="FFFFFF"/>
+                </a:solidFill>
+                <a:latin typeface="Arial"/>
+                <a:ea typeface="Arial"/>
+                <a:cs typeface="Arial"/>
+              </a:rPr>
+              <a:t>Stunde</a:t>
+            </a:r>
+            <a:r>
+              <a:rPr sz="1950" dirty="0">
+                <a:solidFill>
+                  <a:srgbClr val="FFFFFF"/>
+                </a:solidFill>
+                <a:latin typeface="Arial"/>
+                <a:ea typeface="Arial"/>
+                <a:cs typeface="Arial"/>
+              </a:rPr>
+              <a:t>.</a:t>
             </a:r>
           </a:p>
           <a:p>
@@ -7208,7 +5498,7 @@
               </a:defRPr>
             </a:pPr>
             <a:r>
-              <a:rPr sz="1950">
+              <a:rPr sz="1950" dirty="0">
                 <a:solidFill>
                   <a:srgbClr val="FFFFFF"/>
                 </a:solidFill>
@@ -7216,7 +5506,161 @@
                 <a:ea typeface="Arial"/>
                 <a:cs typeface="Arial"/>
               </a:rPr>
-              <a:t>Die Zeitreihe verbindet Erzeugungsmix mit dem ausgewählten Länderfluss und dem Preisdetail.</a:t>
+              <a:t>Die </a:t>
+            </a:r>
+            <a:r>
+              <a:rPr sz="1950" dirty="0" err="1">
+                <a:solidFill>
+                  <a:srgbClr val="FFFFFF"/>
+                </a:solidFill>
+                <a:latin typeface="Arial"/>
+                <a:ea typeface="Arial"/>
+                <a:cs typeface="Arial"/>
+              </a:rPr>
+              <a:t>Zeitreihe</a:t>
+            </a:r>
+            <a:r>
+              <a:rPr sz="1950" dirty="0">
+                <a:solidFill>
+                  <a:srgbClr val="FFFFFF"/>
+                </a:solidFill>
+                <a:latin typeface="Arial"/>
+                <a:ea typeface="Arial"/>
+                <a:cs typeface="Arial"/>
+              </a:rPr>
+              <a:t> </a:t>
+            </a:r>
+            <a:r>
+              <a:rPr sz="1950" dirty="0" err="1">
+                <a:solidFill>
+                  <a:srgbClr val="FFFFFF"/>
+                </a:solidFill>
+                <a:latin typeface="Arial"/>
+                <a:ea typeface="Arial"/>
+                <a:cs typeface="Arial"/>
+              </a:rPr>
+              <a:t>verbindet</a:t>
+            </a:r>
+            <a:r>
+              <a:rPr sz="1950" dirty="0">
+                <a:solidFill>
+                  <a:srgbClr val="FFFFFF"/>
+                </a:solidFill>
+                <a:latin typeface="Arial"/>
+                <a:ea typeface="Arial"/>
+                <a:cs typeface="Arial"/>
+              </a:rPr>
+              <a:t> </a:t>
+            </a:r>
+            <a:r>
+              <a:rPr sz="1950" dirty="0" err="1">
+                <a:solidFill>
+                  <a:srgbClr val="FFFFFF"/>
+                </a:solidFill>
+                <a:latin typeface="Arial"/>
+                <a:ea typeface="Arial"/>
+                <a:cs typeface="Arial"/>
+              </a:rPr>
+              <a:t>Erzeugungsmix</a:t>
+            </a:r>
+            <a:r>
+              <a:rPr sz="1950" dirty="0">
+                <a:solidFill>
+                  <a:srgbClr val="FFFFFF"/>
+                </a:solidFill>
+                <a:latin typeface="Arial"/>
+                <a:ea typeface="Arial"/>
+                <a:cs typeface="Arial"/>
+              </a:rPr>
+              <a:t> </a:t>
+            </a:r>
+            <a:r>
+              <a:rPr sz="1950" dirty="0" err="1">
+                <a:solidFill>
+                  <a:srgbClr val="FFFFFF"/>
+                </a:solidFill>
+                <a:latin typeface="Arial"/>
+                <a:ea typeface="Arial"/>
+                <a:cs typeface="Arial"/>
+              </a:rPr>
+              <a:t>mit</a:t>
+            </a:r>
+            <a:r>
+              <a:rPr sz="1950" dirty="0">
+                <a:solidFill>
+                  <a:srgbClr val="FFFFFF"/>
+                </a:solidFill>
+                <a:latin typeface="Arial"/>
+                <a:ea typeface="Arial"/>
+                <a:cs typeface="Arial"/>
+              </a:rPr>
+              <a:t> dem </a:t>
+            </a:r>
+            <a:r>
+              <a:rPr sz="1950" dirty="0" err="1">
+                <a:solidFill>
+                  <a:srgbClr val="FFFFFF"/>
+                </a:solidFill>
+                <a:latin typeface="Arial"/>
+                <a:ea typeface="Arial"/>
+                <a:cs typeface="Arial"/>
+              </a:rPr>
+              <a:t>ausgewählten</a:t>
+            </a:r>
+            <a:r>
+              <a:rPr sz="1950" dirty="0">
+                <a:solidFill>
+                  <a:srgbClr val="FFFFFF"/>
+                </a:solidFill>
+                <a:latin typeface="Arial"/>
+                <a:ea typeface="Arial"/>
+                <a:cs typeface="Arial"/>
+              </a:rPr>
+              <a:t> </a:t>
+            </a:r>
+            <a:r>
+              <a:rPr sz="1950" dirty="0" err="1">
+                <a:solidFill>
+                  <a:srgbClr val="FFFFFF"/>
+                </a:solidFill>
+                <a:latin typeface="Arial"/>
+                <a:ea typeface="Arial"/>
+                <a:cs typeface="Arial"/>
+              </a:rPr>
+              <a:t>Länderfluss</a:t>
+            </a:r>
+            <a:r>
+              <a:rPr sz="1950" dirty="0">
+                <a:solidFill>
+                  <a:srgbClr val="FFFFFF"/>
+                </a:solidFill>
+                <a:latin typeface="Arial"/>
+                <a:ea typeface="Arial"/>
+                <a:cs typeface="Arial"/>
+              </a:rPr>
+              <a:t> und dem </a:t>
+            </a:r>
+            <a:r>
+              <a:rPr sz="1950" dirty="0" err="1">
+                <a:solidFill>
+                  <a:srgbClr val="FFFFFF"/>
+                </a:solidFill>
+                <a:latin typeface="Arial"/>
+                <a:ea typeface="Arial"/>
+                <a:cs typeface="Arial"/>
+              </a:rPr>
+              <a:t>Preisdetail</a:t>
+            </a:r>
+            <a:r>
+              <a:rPr sz="1950" dirty="0">
+                <a:solidFill>
+                  <a:srgbClr val="FFFFFF"/>
+                </a:solidFill>
+                <a:latin typeface="Arial"/>
+                <a:ea typeface="Arial"/>
+                <a:cs typeface="Arial"/>
+              </a:rPr>
+              <a:t>.</a:t>
             </a:r>
           </a:p>
           <a:p>
@@ -7235,6 +5679,50 @@
               </a:defRPr>
             </a:pPr>
             <a:r>
+              <a:rPr sz="1950" dirty="0">
+                <a:solidFill>
+                  <a:srgbClr val="FFFFFF"/>
+                </a:solidFill>
+                <a:latin typeface="Arial"/>
+                <a:ea typeface="Arial"/>
+                <a:cs typeface="Arial"/>
+              </a:rPr>
+              <a:t>Die </a:t>
+            </a:r>
+            <a:r>
+              <a:rPr sz="1950" dirty="0" err="1">
+                <a:solidFill>
+                  <a:srgbClr val="FFFFFF"/>
+                </a:solidFill>
+                <a:latin typeface="Arial"/>
+                <a:ea typeface="Arial"/>
+                <a:cs typeface="Arial"/>
+              </a:rPr>
+              <a:t>Pixelmatrix</a:t>
+            </a:r>
+            <a:r>
+              <a:rPr sz="1950" dirty="0">
+                <a:solidFill>
+                  <a:srgbClr val="FFFFFF"/>
+                </a:solidFill>
+                <a:latin typeface="Arial"/>
+                <a:ea typeface="Arial"/>
+                <a:cs typeface="Arial"/>
+              </a:rPr>
+              <a:t> </a:t>
+            </a:r>
+            <a:r>
+              <a:rPr sz="1950" dirty="0" err="1">
+                <a:solidFill>
+                  <a:srgbClr val="FFFFFF"/>
+                </a:solidFill>
+                <a:latin typeface="Arial"/>
+                <a:ea typeface="Arial"/>
+                <a:cs typeface="Arial"/>
+              </a:rPr>
+              <a:t>verdichtet</a:t>
+            </a:r>
+            <a:r>
               <a:rPr sz="1950">
                 <a:solidFill>
                   <a:srgbClr val="FFFFFF"/>
@@ -7243,7 +5731,117 @@
                 <a:ea typeface="Arial"/>
                 <a:cs typeface="Arial"/>
               </a:rPr>
-              <a:t>Die Pixelmatrix verdichtet 8.184 Werte und dient zugleich als Auswahlwerkzeug.</a:t>
+              <a:t> 8.184 </a:t>
+            </a:r>
+            <a:r>
+              <a:rPr sz="1950" dirty="0" err="1">
+                <a:solidFill>
+                  <a:srgbClr val="FFFFFF"/>
+                </a:solidFill>
+                <a:latin typeface="Arial"/>
+                <a:ea typeface="Arial"/>
+                <a:cs typeface="Arial"/>
+              </a:rPr>
+              <a:t>Werte</a:t>
+            </a:r>
+            <a:r>
+              <a:rPr sz="1950" dirty="0">
+                <a:solidFill>
+                  <a:srgbClr val="FFFFFF"/>
+                </a:solidFill>
+                <a:latin typeface="Arial"/>
+                <a:ea typeface="Arial"/>
+                <a:cs typeface="Arial"/>
+              </a:rPr>
+              <a:t> und </a:t>
+            </a:r>
+            <a:r>
+              <a:rPr sz="1950" dirty="0" err="1">
+                <a:solidFill>
+                  <a:srgbClr val="FFFFFF"/>
+                </a:solidFill>
+                <a:latin typeface="Arial"/>
+                <a:ea typeface="Arial"/>
+                <a:cs typeface="Arial"/>
+              </a:rPr>
+              <a:t>dient</a:t>
+            </a:r>
+            <a:r>
+              <a:rPr sz="1950" dirty="0">
+                <a:solidFill>
+                  <a:srgbClr val="FFFFFF"/>
+                </a:solidFill>
+                <a:latin typeface="Arial"/>
+                <a:ea typeface="Arial"/>
+                <a:cs typeface="Arial"/>
+              </a:rPr>
+              <a:t> </a:t>
+            </a:r>
+            <a:r>
+              <a:rPr sz="1950" dirty="0" err="1">
+                <a:solidFill>
+                  <a:srgbClr val="FFFFFF"/>
+                </a:solidFill>
+                <a:latin typeface="Arial"/>
+                <a:ea typeface="Arial"/>
+                <a:cs typeface="Arial"/>
+              </a:rPr>
+              <a:t>zugleich</a:t>
+            </a:r>
+            <a:r>
+              <a:rPr sz="1950" dirty="0">
+                <a:solidFill>
+                  <a:srgbClr val="FFFFFF"/>
+                </a:solidFill>
+                <a:latin typeface="Arial"/>
+                <a:ea typeface="Arial"/>
+                <a:cs typeface="Arial"/>
+              </a:rPr>
+              <a:t> </a:t>
+            </a:r>
+            <a:r>
+              <a:rPr sz="1950" dirty="0" err="1">
+                <a:solidFill>
+                  <a:srgbClr val="FFFFFF"/>
+                </a:solidFill>
+                <a:latin typeface="Arial"/>
+                <a:ea typeface="Arial"/>
+                <a:cs typeface="Arial"/>
+              </a:rPr>
+              <a:t>als</a:t>
+            </a:r>
+            <a:r>
+              <a:rPr sz="1950" dirty="0">
+                <a:solidFill>
+                  <a:srgbClr val="FFFFFF"/>
+                </a:solidFill>
+                <a:latin typeface="Arial"/>
+                <a:ea typeface="Arial"/>
+                <a:cs typeface="Arial"/>
+              </a:rPr>
+              <a:t> </a:t>
+            </a:r>
+            <a:r>
+              <a:rPr sz="1950" dirty="0" err="1">
+                <a:solidFill>
+                  <a:srgbClr val="FFFFFF"/>
+                </a:solidFill>
+                <a:latin typeface="Arial"/>
+                <a:ea typeface="Arial"/>
+                <a:cs typeface="Arial"/>
+              </a:rPr>
+              <a:t>Auswahlwerkzeug</a:t>
+            </a:r>
+            <a:r>
+              <a:rPr sz="1950" dirty="0">
+                <a:solidFill>
+                  <a:srgbClr val="FFFFFF"/>
+                </a:solidFill>
+                <a:latin typeface="Arial"/>
+                <a:ea typeface="Arial"/>
+                <a:cs typeface="Arial"/>
+              </a:rPr>
+              <a:t>.</a:t>
             </a:r>
           </a:p>
           <a:p>
@@ -7262,7 +5860,7 @@
               </a:defRPr>
             </a:pPr>
             <a:r>
-              <a:rPr sz="1950">
+              <a:rPr sz="1950" dirty="0">
                 <a:solidFill>
                   <a:srgbClr val="FFFFFF"/>
                 </a:solidFill>
@@ -7270,7 +5868,161 @@
                 <a:ea typeface="Arial"/>
                 <a:cs typeface="Arial"/>
               </a:rPr>
-              <a:t>Der gemeinsame Elm-State hält Land, Stunde und Zeitfenster in allen Ansichten konsistent.</a:t>
+              <a:t>Der </a:t>
+            </a:r>
+            <a:r>
+              <a:rPr sz="1950" dirty="0" err="1">
+                <a:solidFill>
+                  <a:srgbClr val="FFFFFF"/>
+                </a:solidFill>
+                <a:latin typeface="Arial"/>
+                <a:ea typeface="Arial"/>
+                <a:cs typeface="Arial"/>
+              </a:rPr>
+              <a:t>gemeinsame</a:t>
+            </a:r>
+            <a:r>
+              <a:rPr sz="1950" dirty="0">
+                <a:solidFill>
+                  <a:srgbClr val="FFFFFF"/>
+                </a:solidFill>
+                <a:latin typeface="Arial"/>
+                <a:ea typeface="Arial"/>
+                <a:cs typeface="Arial"/>
+              </a:rPr>
+              <a:t> Elm-State </a:t>
+            </a:r>
+            <a:r>
+              <a:rPr sz="1950" dirty="0" err="1">
+                <a:solidFill>
+                  <a:srgbClr val="FFFFFF"/>
+                </a:solidFill>
+                <a:latin typeface="Arial"/>
+                <a:ea typeface="Arial"/>
+                <a:cs typeface="Arial"/>
+              </a:rPr>
+              <a:t>hält</a:t>
+            </a:r>
+            <a:r>
+              <a:rPr sz="1950" dirty="0">
+                <a:solidFill>
+                  <a:srgbClr val="FFFFFF"/>
+                </a:solidFill>
+                <a:latin typeface="Arial"/>
+                <a:ea typeface="Arial"/>
+                <a:cs typeface="Arial"/>
+              </a:rPr>
+              <a:t> Land, </a:t>
+            </a:r>
+            <a:r>
+              <a:rPr sz="1950" dirty="0" err="1">
+                <a:solidFill>
+                  <a:srgbClr val="FFFFFF"/>
+                </a:solidFill>
+                <a:latin typeface="Arial"/>
+                <a:ea typeface="Arial"/>
+                <a:cs typeface="Arial"/>
+              </a:rPr>
+              <a:t>Stunde</a:t>
+            </a:r>
+            <a:r>
+              <a:rPr sz="1950" dirty="0">
+                <a:solidFill>
+                  <a:srgbClr val="FFFFFF"/>
+                </a:solidFill>
+                <a:latin typeface="Arial"/>
+                <a:ea typeface="Arial"/>
+                <a:cs typeface="Arial"/>
+              </a:rPr>
+              <a:t> und </a:t>
+            </a:r>
+            <a:r>
+              <a:rPr sz="1950" dirty="0" err="1">
+                <a:solidFill>
+                  <a:srgbClr val="FFFFFF"/>
+                </a:solidFill>
+                <a:latin typeface="Arial"/>
+                <a:ea typeface="Arial"/>
+                <a:cs typeface="Arial"/>
+              </a:rPr>
+              <a:t>Zeitfenster</a:t>
+            </a:r>
+            <a:r>
+              <a:rPr sz="1950" dirty="0">
+                <a:solidFill>
+                  <a:srgbClr val="FFFFFF"/>
+                </a:solidFill>
+                <a:latin typeface="Arial"/>
+                <a:ea typeface="Arial"/>
+                <a:cs typeface="Arial"/>
+              </a:rPr>
+              <a:t> in </a:t>
+            </a:r>
+            <a:r>
+              <a:rPr sz="1950" dirty="0" err="1">
+                <a:solidFill>
+                  <a:srgbClr val="FFFFFF"/>
+                </a:solidFill>
+                <a:latin typeface="Arial"/>
+                <a:ea typeface="Arial"/>
+                <a:cs typeface="Arial"/>
+              </a:rPr>
+              <a:t>allen</a:t>
+            </a:r>
+            <a:r>
+              <a:rPr sz="1950" dirty="0">
+                <a:solidFill>
+                  <a:srgbClr val="FFFFFF"/>
+                </a:solidFill>
+                <a:latin typeface="Arial"/>
+                <a:ea typeface="Arial"/>
+                <a:cs typeface="Arial"/>
+              </a:rPr>
+              <a:t> </a:t>
+            </a:r>
+            <a:r>
+              <a:rPr sz="1950" dirty="0" err="1">
+                <a:solidFill>
+                  <a:srgbClr val="FFFFFF"/>
+                </a:solidFill>
+                <a:latin typeface="Arial"/>
+                <a:ea typeface="Arial"/>
+                <a:cs typeface="Arial"/>
+              </a:rPr>
+              <a:t>Ansichten</a:t>
+            </a:r>
+            <a:r>
+              <a:rPr sz="1950" dirty="0">
+                <a:solidFill>
+                  <a:srgbClr val="FFFFFF"/>
+                </a:solidFill>
+                <a:latin typeface="Arial"/>
+                <a:ea typeface="Arial"/>
+                <a:cs typeface="Arial"/>
+              </a:rPr>
+              <a:t> </a:t>
+            </a:r>
+            <a:r>
+              <a:rPr sz="1950" dirty="0" err="1">
+                <a:solidFill>
+                  <a:srgbClr val="FFFFFF"/>
+                </a:solidFill>
+                <a:latin typeface="Arial"/>
+                <a:ea typeface="Arial"/>
+                <a:cs typeface="Arial"/>
+              </a:rPr>
+              <a:t>konsistent</a:t>
+            </a:r>
+            <a:r>
+              <a:rPr sz="1950" dirty="0">
+                <a:solidFill>
+                  <a:srgbClr val="FFFFFF"/>
+                </a:solidFill>
+                <a:latin typeface="Arial"/>
+                <a:ea typeface="Arial"/>
+                <a:cs typeface="Arial"/>
+              </a:rPr>
+              <a:t>.</a:t>
             </a:r>
           </a:p>
         </p:txBody>
@@ -7376,7 +6128,7 @@
               </a:defRPr>
             </a:pPr>
             <a:r>
-              <a:rPr sz="1425" b="0">
+              <a:rPr sz="1425" b="0" dirty="0">
                 <a:solidFill>
                   <a:srgbClr val="FFFFFF"/>
                 </a:solidFill>
